--- a/courses/learn_partitioning/module01-01-cutsize-balance/slides.pptx
+++ b/courses/learn_partitioning/module01-01-cutsize-balance/slides.pptx
@@ -16,6 +16,9 @@
     <p:sldId id="264" r:id="rId16"/>
     <p:sldId id="265" r:id="rId17"/>
     <p:sldId id="266" r:id="rId18"/>
+    <p:sldId id="267" r:id="rId19"/>
+    <p:sldId id="268" r:id="rId20"/>
+    <p:sldId id="269" r:id="rId21"/>
   </p:sldIdLst>
   <p:sldSz cx="12191695" cy="6858000" type="screen4x3"/>
   <p:notesSz cx="6858000" cy="9144000"/>
@@ -582,7 +585,7 @@
           <a:lstStyle/>
           <a:p>
             <a:r>
-              <a:t>Common traps: optimizing cut while ignoring balance; reporting pairwise cut when the instance is a hypergraph; flipping locked terminals; and stopping before rollback to the best KL or FM prefix. For multilevel flows, verify coarsening before you blame the refiner.</a:t>
+              <a:t>In the browser lab track, open the **cutsize-balance** lab from the tools shelf. Load the starter graph, run the algorithm once, and read cutsize and balance in the metrics panel. Work the challenges that lock the goldens, then come back to implement the same loop yourself.</a:t>
             </a:r>
           </a:p>
         </p:txBody>
@@ -652,6 +655,146 @@
           <a:lstStyle/>
           <a:p>
             <a:r>
+              <a:t>In the implement track, open this module's EXAMPLES.md Pseudocode section and the course common solvers. Parse the tiny graph, run the algorithm with a deterministic seed, and print the assignment plus cutsize and balance. Match the browser goldens before you claim the checklist.</a:t>
+            </a:r>
+          </a:p>
+        </p:txBody>
+      </p:sp>
+      <p:sp>
+        <p:nvSpPr>
+          <p:cNvPr id="4" name="Slide Number Placeholder 3"/>
+          <p:cNvSpPr>
+            <a:spLocks noGrp="1"/>
+          </p:cNvSpPr>
+          <p:nvPr>
+            <p:ph type="sldNum" idx="5" sz="quarter"/>
+          </p:nvPr>
+        </p:nvSpPr>
+        <p:spPr/>
+      </p:sp>
+    </p:spTree>
+  </p:cSld>
+  <p:clrMapOvr>
+    <a:masterClrMapping/>
+  </p:clrMapOvr>
+</p:notes>
+</file>
+
+<file path=ppt/notesSlides/notesSlide12.xml><?xml version="1.0" encoding="utf-8"?>
+<p:notes xmlns:a="http://schemas.openxmlformats.org/drawingml/2006/main" xmlns:p="http://schemas.openxmlformats.org/presentationml/2006/main" xmlns:r="http://schemas.openxmlformats.org/officeDocument/2006/relationships">
+  <p:cSld>
+    <p:spTree>
+      <p:nvGrpSpPr>
+        <p:cNvPr id="1" name=""/>
+        <p:cNvGrpSpPr/>
+        <p:nvPr/>
+      </p:nvGrpSpPr>
+      <p:grpSpPr>
+        <a:xfrm>
+          <a:off x="0" y="0"/>
+          <a:ext cx="0" cy="0"/>
+          <a:chOff x="0" y="0"/>
+          <a:chExt cx="0" cy="0"/>
+        </a:xfrm>
+      </p:grpSpPr>
+      <p:sp>
+        <p:nvSpPr>
+          <p:cNvPr id="2" name="Slide Image Placeholder 1"/>
+          <p:cNvSpPr>
+            <a:spLocks noGrp="1"/>
+          </p:cNvSpPr>
+          <p:nvPr>
+            <p:ph type="sldImg" idx="2"/>
+          </p:nvPr>
+        </p:nvSpPr>
+        <p:spPr/>
+      </p:sp>
+      <p:sp>
+        <p:nvSpPr>
+          <p:cNvPr id="3" name="Notes Placeholder 2"/>
+          <p:cNvSpPr>
+            <a:spLocks noGrp="1"/>
+          </p:cNvSpPr>
+          <p:nvPr>
+            <p:ph type="body" idx="3" sz="quarter"/>
+          </p:nvPr>
+        </p:nvSpPr>
+        <p:spPr/>
+        <p:txBody>
+          <a:bodyPr/>
+          <a:lstStyle/>
+          <a:p>
+            <a:r>
+              <a:t>Common traps: optimizing cut while ignoring balance; reporting pairwise cut when the instance is a hypergraph; flipping locked terminals; and stopping before rollback to the best KL or FM prefix. For multilevel flows, verify coarsening before you blame the refiner.</a:t>
+            </a:r>
+          </a:p>
+        </p:txBody>
+      </p:sp>
+      <p:sp>
+        <p:nvSpPr>
+          <p:cNvPr id="4" name="Slide Number Placeholder 3"/>
+          <p:cNvSpPr>
+            <a:spLocks noGrp="1"/>
+          </p:cNvSpPr>
+          <p:nvPr>
+            <p:ph type="sldNum" idx="5" sz="quarter"/>
+          </p:nvPr>
+        </p:nvSpPr>
+        <p:spPr/>
+      </p:sp>
+    </p:spTree>
+  </p:cSld>
+  <p:clrMapOvr>
+    <a:masterClrMapping/>
+  </p:clrMapOvr>
+</p:notes>
+</file>
+
+<file path=ppt/notesSlides/notesSlide13.xml><?xml version="1.0" encoding="utf-8"?>
+<p:notes xmlns:a="http://schemas.openxmlformats.org/drawingml/2006/main" xmlns:p="http://schemas.openxmlformats.org/presentationml/2006/main" xmlns:r="http://schemas.openxmlformats.org/officeDocument/2006/relationships">
+  <p:cSld>
+    <p:spTree>
+      <p:nvGrpSpPr>
+        <p:cNvPr id="1" name=""/>
+        <p:cNvGrpSpPr/>
+        <p:nvPr/>
+      </p:nvGrpSpPr>
+      <p:grpSpPr>
+        <a:xfrm>
+          <a:off x="0" y="0"/>
+          <a:ext cx="0" cy="0"/>
+          <a:chOff x="0" y="0"/>
+          <a:chExt cx="0" cy="0"/>
+        </a:xfrm>
+      </p:grpSpPr>
+      <p:sp>
+        <p:nvSpPr>
+          <p:cNvPr id="2" name="Slide Image Placeholder 1"/>
+          <p:cNvSpPr>
+            <a:spLocks noGrp="1"/>
+          </p:cNvSpPr>
+          <p:nvPr>
+            <p:ph type="sldImg" idx="2"/>
+          </p:nvPr>
+        </p:nvSpPr>
+        <p:spPr/>
+      </p:sp>
+      <p:sp>
+        <p:nvSpPr>
+          <p:cNvPr id="3" name="Notes Placeholder 2"/>
+          <p:cNvSpPr>
+            <a:spLocks noGrp="1"/>
+          </p:cNvSpPr>
+          <p:nvPr>
+            <p:ph type="body" idx="3" sz="quarter"/>
+          </p:nvPr>
+        </p:nvSpPr>
+        <p:spPr/>
+        <p:txBody>
+          <a:bodyPr/>
+          <a:lstStyle/>
+          <a:p>
+            <a:r>
               <a:t>Complete the checklist for at least one track—preferably both. Implement until your metrics match the starter goldens. When you’re ready, take the short quiz, then continue to the next module.</a:t>
             </a:r>
           </a:p>
@@ -725,12 +868,6 @@
               <a:t>For every edge, if the endpoints sit in different parts, add its weight to the cut. Balance ratio is the smaller part size over the larger. Never celebrate a zero cut that parks every node on one side—that is not a usable partition.</a:t>
             </a:r>
           </a:p>
-          <a:p/>
-          <a:p>
-            <a:r>
-              <a:t>&lt;!-- algorithm-walkthrough --&gt;</a:t>
-            </a:r>
-          </a:p>
         </p:txBody>
       </p:sp>
       <p:sp>
@@ -798,7 +935,13 @@
           <a:lstStyle/>
           <a:p>
             <a:r>
-              <a:t>TINY_GRAPH has five cells. Partition quality is measured by cutsize (sum of cut edge weights) and balance (how even the two sides are).</a:t>
+              <a:t>Before any refinement, write the metrics. Pseudocode sums cut edges for cutsize and part sizes for balance. Imbalance is the absolute size gap over total size.</a:t>
+            </a:r>
+          </a:p>
+          <a:p/>
+          <a:p>
+            <a:r>
+              <a:t>Open this module's examples file and find the Pseudocode section. That written sketch is what you implement on the implement track and what the browser challenges measure.</a:t>
             </a:r>
           </a:p>
         </p:txBody>
@@ -868,7 +1011,7 @@
           <a:lstStyle/>
           <a:p>
             <a:r>
-              <a:t>Seed AE|BCD cuts both heavy edges A–B(5) and D–E(5). Cutsize is 12 — a terrible wire cost even though the split is legal.</a:t>
+              <a:t>Bad seed AE versus BCD cuts both heavy edges for cutsize twelve. Golden ABC versus DE drops the cut to three with sizes three and two.</a:t>
             </a:r>
           </a:p>
         </p:txBody>
@@ -938,7 +1081,7 @@
           <a:lstStyle/>
           <a:p>
             <a:r>
-              <a:t>Side sizes are 2 vs 3, so balance ratio = 2/3 and imbalance |2−3|/5 = 0.2. The split is moderately balanced — cutsize, not balance, is the problem.</a:t>
+              <a:t>TINY_GRAPH has five cells. Partition quality is measured by cutsize (sum of cut edge weights) and balance (how even the two sides are).</a:t>
             </a:r>
           </a:p>
         </p:txBody>
@@ -1008,7 +1151,7 @@
           <a:lstStyle/>
           <a:p>
             <a:r>
-              <a:t>Golden bipartition ABC|DE keeps A–B and D–E internal. Only weak bridges C–D(2) and C–E(1) are cut — cutsize drops to 3 with the same 2/3 ratio.</a:t>
+              <a:t>Seed AE|BCD cuts both heavy edges A–B(5) and D–E(5). Cutsize is 12 — a terrible wire cost even though the split is legal.</a:t>
             </a:r>
           </a:p>
         </p:txBody>
@@ -1078,13 +1221,7 @@
           <a:lstStyle/>
           <a:p>
             <a:r>
-              <a:t>Two partitions can share the same balance but differ wildly in cut. EDA flows optimize cut under balance constraints — never balance alone.</a:t>
-            </a:r>
-          </a:p>
-          <a:p/>
-          <a:p>
-            <a:r>
-              <a:t>&lt;!-- /algorithm-walkthrough --&gt;</a:t>
+              <a:t>Side sizes are 2 vs 3, so balance ratio = 2/3 and imbalance |2−3|/5 = 0.2. The split is moderately balanced — cutsize, not balance, is the problem.</a:t>
             </a:r>
           </a:p>
         </p:txBody>
@@ -1154,7 +1291,7 @@
           <a:lstStyle/>
           <a:p>
             <a:r>
-              <a:t>In the browser lab track, open the **cutsize-balance** lab from the tools shelf. Load the starter graph, run the algorithm once, and read cutsize and balance in the metrics panel. Work the challenges that lock the goldens, then come back to implement the same loop yourself.</a:t>
+              <a:t>Golden bipartition ABC|DE keeps A–B and D–E internal. Only weak bridges C–D(2) and C–E(1) are cut — cutsize drops to 3 with the same 2/3 ratio.</a:t>
             </a:r>
           </a:p>
         </p:txBody>
@@ -1224,7 +1361,7 @@
           <a:lstStyle/>
           <a:p>
             <a:r>
-              <a:t>In the implement track, open this module’s examples and the course `common/` solvers. Parse the tiny graph, run the algorithm with a deterministic seed, and print the assignment plus cutsize and balance. Match the browser goldens before you claim the checklist.</a:t>
+              <a:t>Two partitions can share the same balance but differ wildly in cut. EDA flows optimize cut under balance constraints — never balance alone.</a:t>
             </a:r>
           </a:p>
         </p:txBody>
@@ -4382,21 +4519,45 @@
                 </a:solidFill>
                 <a:latin typeface="Calibri"/>
               </a:rPr>
-              <a:t>Pitfalls</a:t>
-            </a:r>
-          </a:p>
-        </p:txBody>
-      </p:sp>
-      <p:sp>
-        <p:nvSpPr>
-          <p:cNvPr id="3" name="TextBox 2"/>
+              <a:t>Cutsize + balance literacy</a:t>
+            </a:r>
+          </a:p>
+        </p:txBody>
+      </p:sp>
+      <p:pic>
+        <p:nvPicPr>
+          <p:cNvPr id="3" name="Picture 2" descr="05-takeaway.png"/>
+          <p:cNvPicPr>
+            <a:picLocks noChangeAspect="1"/>
+          </p:cNvPicPr>
+          <p:nvPr/>
+        </p:nvPicPr>
+        <p:blipFill>
+          <a:blip r:embed="rId2"/>
+          <a:stretch>
+            <a:fillRect/>
+          </a:stretch>
+        </p:blipFill>
+        <p:spPr>
+          <a:xfrm>
+            <a:off x="548640" y="1143000"/>
+            <a:ext cx="9404113" cy="4572000"/>
+          </a:xfrm>
+          <a:prstGeom prst="rect">
+            <a:avLst/>
+          </a:prstGeom>
+        </p:spPr>
+      </p:pic>
+      <p:sp>
+        <p:nvSpPr>
+          <p:cNvPr id="4" name="TextBox 3"/>
           <p:cNvSpPr txBox="1"/>
           <p:nvPr/>
         </p:nvSpPr>
         <p:spPr>
           <a:xfrm>
-            <a:off x="548640" y="1234440"/>
-            <a:ext cx="11064240" cy="4937760"/>
+            <a:off x="548640" y="5897880"/>
+            <a:ext cx="11064240" cy="411480"/>
           </a:xfrm>
           <a:prstGeom prst="rect">
             <a:avLst/>
@@ -4409,54 +4570,26 @@
           </a:bodyPr>
           <a:lstStyle/>
           <a:p>
-            <a:pPr lvl="0" marL="457200" indent="-228600">
-              <a:buFont typeface="Calibri"/>
-              <a:spcAft>
-                <a:spcPts val="1000"/>
-              </a:spcAft>
-              <a:buSzPct val="100000"/>
-              <a:buChar char="•"/>
+            <a:pPr>
               <a:lnSpc>
                 <a:spcPts val="2200"/>
               </a:lnSpc>
             </a:pPr>
             <a:r>
-              <a:rPr sz="2000" b="0">
+              <a:rPr sz="1200" b="0">
                 <a:solidFill>
                   <a:srgbClr val="333333"/>
                 </a:solidFill>
                 <a:latin typeface="Calibri"/>
               </a:rPr>
-              <a:t>Common traps</a:t>
-            </a:r>
-          </a:p>
-          <a:p>
-            <a:pPr lvl="0" marL="457200" indent="-228600">
-              <a:buFont typeface="Calibri"/>
-              <a:spcAft>
-                <a:spcPts val="1000"/>
-              </a:spcAft>
-              <a:buSzPct val="100000"/>
-              <a:buChar char="•"/>
-              <a:lnSpc>
-                <a:spcPts val="2200"/>
-              </a:lnSpc>
-            </a:pPr>
-            <a:r>
-              <a:rPr sz="2000" b="0">
-                <a:solidFill>
-                  <a:srgbClr val="333333"/>
-                </a:solidFill>
-                <a:latin typeface="Calibri"/>
-              </a:rPr>
-              <a:t>For multilevel flows, verify coarsening before you blame the refiner</a:t>
-            </a:r>
-          </a:p>
-        </p:txBody>
-      </p:sp>
-      <p:sp>
-        <p:nvSpPr>
-          <p:cNvPr id="4" name="TextBox 3"/>
+              <a:t>Cutsize + balance literacy</a:t>
+            </a:r>
+          </a:p>
+        </p:txBody>
+      </p:sp>
+      <p:sp>
+        <p:nvSpPr>
+          <p:cNvPr id="5" name="TextBox 4"/>
           <p:cNvSpPr txBox="1"/>
           <p:nvPr/>
         </p:nvSpPr>
@@ -4545,6 +4678,557 @@
                 </a:solidFill>
                 <a:latin typeface="Calibri"/>
               </a:rPr>
+              <a:t>Browser lab track</a:t>
+            </a:r>
+          </a:p>
+        </p:txBody>
+      </p:sp>
+      <p:sp>
+        <p:nvSpPr>
+          <p:cNvPr id="3" name="TextBox 2"/>
+          <p:cNvSpPr txBox="1"/>
+          <p:nvPr/>
+        </p:nvSpPr>
+        <p:spPr>
+          <a:xfrm>
+            <a:off x="548640" y="1234440"/>
+            <a:ext cx="11064240" cy="4937760"/>
+          </a:xfrm>
+          <a:prstGeom prst="rect">
+            <a:avLst/>
+          </a:prstGeom>
+          <a:noFill/>
+        </p:spPr>
+        <p:txBody>
+          <a:bodyPr wrap="square">
+            <a:noAutofit/>
+          </a:bodyPr>
+          <a:lstStyle/>
+          <a:p>
+            <a:pPr lvl="0" marL="457200" indent="-228600">
+              <a:buFont typeface="Calibri"/>
+              <a:spcAft>
+                <a:spcPts val="1000"/>
+              </a:spcAft>
+              <a:buSzPct val="100000"/>
+              <a:buChar char="•"/>
+              <a:lnSpc>
+                <a:spcPts val="2200"/>
+              </a:lnSpc>
+            </a:pPr>
+            <a:r>
+              <a:rPr sz="2000" b="0">
+                <a:solidFill>
+                  <a:srgbClr val="333333"/>
+                </a:solidFill>
+                <a:latin typeface="Calibri"/>
+              </a:rPr>
+              <a:t>In the browser lab track, open the </a:t>
+            </a:r>
+            <a:r>
+              <a:rPr sz="2000" b="1">
+                <a:solidFill>
+                  <a:srgbClr val="333333"/>
+                </a:solidFill>
+                <a:latin typeface="Calibri"/>
+              </a:rPr>
+              <a:t>cutsize-balance</a:t>
+            </a:r>
+            <a:r>
+              <a:rPr sz="2000" b="0">
+                <a:solidFill>
+                  <a:srgbClr val="333333"/>
+                </a:solidFill>
+                <a:latin typeface="Calibri"/>
+              </a:rPr>
+              <a:t> lab from the tools shelf</a:t>
+            </a:r>
+          </a:p>
+          <a:p>
+            <a:pPr lvl="0" marL="457200" indent="-228600">
+              <a:buFont typeface="Calibri"/>
+              <a:spcAft>
+                <a:spcPts val="1000"/>
+              </a:spcAft>
+              <a:buSzPct val="100000"/>
+              <a:buChar char="•"/>
+              <a:lnSpc>
+                <a:spcPts val="2200"/>
+              </a:lnSpc>
+            </a:pPr>
+            <a:r>
+              <a:rPr sz="2000" b="0">
+                <a:solidFill>
+                  <a:srgbClr val="333333"/>
+                </a:solidFill>
+                <a:latin typeface="Calibri"/>
+              </a:rPr>
+              <a:t>Load the starter graph, run the algorithm once</a:t>
+            </a:r>
+          </a:p>
+          <a:p>
+            <a:pPr lvl="0" marL="457200" indent="-228600">
+              <a:buFont typeface="Calibri"/>
+              <a:spcAft>
+                <a:spcPts val="1000"/>
+              </a:spcAft>
+              <a:buSzPct val="100000"/>
+              <a:buChar char="•"/>
+              <a:lnSpc>
+                <a:spcPts val="2200"/>
+              </a:lnSpc>
+            </a:pPr>
+            <a:r>
+              <a:rPr sz="2000" b="0">
+                <a:solidFill>
+                  <a:srgbClr val="333333"/>
+                </a:solidFill>
+                <a:latin typeface="Calibri"/>
+              </a:rPr>
+              <a:t>Work the challenges that lock the goldens</a:t>
+            </a:r>
+          </a:p>
+        </p:txBody>
+      </p:sp>
+      <p:sp>
+        <p:nvSpPr>
+          <p:cNvPr id="4" name="TextBox 3"/>
+          <p:cNvSpPr txBox="1"/>
+          <p:nvPr/>
+        </p:nvSpPr>
+        <p:spPr>
+          <a:xfrm>
+            <a:off x="548640" y="6355080"/>
+            <a:ext cx="11064240" cy="320040"/>
+          </a:xfrm>
+          <a:prstGeom prst="rect">
+            <a:avLst/>
+          </a:prstGeom>
+          <a:noFill/>
+        </p:spPr>
+        <p:txBody>
+          <a:bodyPr wrap="square">
+            <a:noAutofit/>
+          </a:bodyPr>
+          <a:lstStyle/>
+          <a:p>
+            <a:pPr algn="r">
+              <a:lnSpc>
+                <a:spcPts val="2200"/>
+              </a:lnSpc>
+              <a:defRPr sz="1000" b="0">
+                <a:solidFill>
+                  <a:srgbClr val="666666"/>
+                </a:solidFill>
+                <a:latin typeface="Calibri"/>
+              </a:defRPr>
+            </a:pPr>
+            <a:r>
+              <a:t>learn_partitioning — 01 cutsize balance</a:t>
+            </a:r>
+          </a:p>
+        </p:txBody>
+      </p:sp>
+    </p:spTree>
+  </p:cSld>
+  <p:clrMapOvr>
+    <a:masterClrMapping/>
+  </p:clrMapOvr>
+</p:sld>
+</file>
+
+<file path=ppt/slides/slide12.xml><?xml version="1.0" encoding="utf-8"?>
+<p:sld xmlns:a="http://schemas.openxmlformats.org/drawingml/2006/main" xmlns:p="http://schemas.openxmlformats.org/presentationml/2006/main" xmlns:r="http://schemas.openxmlformats.org/officeDocument/2006/relationships">
+  <p:cSld>
+    <p:spTree>
+      <p:nvGrpSpPr>
+        <p:cNvPr id="1" name=""/>
+        <p:cNvGrpSpPr/>
+        <p:nvPr/>
+      </p:nvGrpSpPr>
+      <p:grpSpPr/>
+      <p:sp>
+        <p:nvSpPr>
+          <p:cNvPr id="2" name="TextBox 1"/>
+          <p:cNvSpPr txBox="1"/>
+          <p:nvPr/>
+        </p:nvSpPr>
+        <p:spPr>
+          <a:xfrm>
+            <a:off x="548640" y="411480"/>
+            <a:ext cx="11064240" cy="777240"/>
+          </a:xfrm>
+          <a:prstGeom prst="rect">
+            <a:avLst/>
+          </a:prstGeom>
+          <a:noFill/>
+        </p:spPr>
+        <p:txBody>
+          <a:bodyPr wrap="square">
+            <a:noAutofit/>
+          </a:bodyPr>
+          <a:lstStyle/>
+          <a:p>
+            <a:pPr>
+              <a:lnSpc>
+                <a:spcPts val="2200"/>
+              </a:lnSpc>
+            </a:pPr>
+            <a:r>
+              <a:rPr sz="2800" b="1">
+                <a:solidFill>
+                  <a:srgbClr val="1A1A2E"/>
+                </a:solidFill>
+                <a:latin typeface="Calibri"/>
+              </a:rPr>
+              <a:t>Implement track</a:t>
+            </a:r>
+          </a:p>
+        </p:txBody>
+      </p:sp>
+      <p:sp>
+        <p:nvSpPr>
+          <p:cNvPr id="3" name="TextBox 2"/>
+          <p:cNvSpPr txBox="1"/>
+          <p:nvPr/>
+        </p:nvSpPr>
+        <p:spPr>
+          <a:xfrm>
+            <a:off x="548640" y="1234440"/>
+            <a:ext cx="11064240" cy="4937760"/>
+          </a:xfrm>
+          <a:prstGeom prst="rect">
+            <a:avLst/>
+          </a:prstGeom>
+          <a:noFill/>
+        </p:spPr>
+        <p:txBody>
+          <a:bodyPr wrap="square">
+            <a:noAutofit/>
+          </a:bodyPr>
+          <a:lstStyle/>
+          <a:p>
+            <a:pPr lvl="0" marL="457200" indent="-228600">
+              <a:buFont typeface="Calibri"/>
+              <a:spcAft>
+                <a:spcPts val="1000"/>
+              </a:spcAft>
+              <a:buSzPct val="100000"/>
+              <a:buChar char="•"/>
+              <a:lnSpc>
+                <a:spcPts val="2200"/>
+              </a:lnSpc>
+            </a:pPr>
+            <a:r>
+              <a:rPr sz="2000" b="0">
+                <a:solidFill>
+                  <a:srgbClr val="333333"/>
+                </a:solidFill>
+                <a:latin typeface="Calibri"/>
+              </a:rPr>
+              <a:t>In the implement track</a:t>
+            </a:r>
+          </a:p>
+          <a:p>
+            <a:pPr lvl="0" marL="457200" indent="-228600">
+              <a:buFont typeface="Calibri"/>
+              <a:spcAft>
+                <a:spcPts val="1000"/>
+              </a:spcAft>
+              <a:buSzPct val="100000"/>
+              <a:buChar char="•"/>
+              <a:lnSpc>
+                <a:spcPts val="2200"/>
+              </a:lnSpc>
+            </a:pPr>
+            <a:r>
+              <a:rPr sz="2000" b="0">
+                <a:solidFill>
+                  <a:srgbClr val="333333"/>
+                </a:solidFill>
+                <a:latin typeface="Calibri"/>
+              </a:rPr>
+              <a:t>Parse the tiny graph, run the algorithm with a deterministic seed</a:t>
+            </a:r>
+          </a:p>
+          <a:p>
+            <a:pPr lvl="0" marL="457200" indent="-228600">
+              <a:buFont typeface="Calibri"/>
+              <a:spcAft>
+                <a:spcPts val="1000"/>
+              </a:spcAft>
+              <a:buSzPct val="100000"/>
+              <a:buChar char="•"/>
+              <a:lnSpc>
+                <a:spcPts val="2200"/>
+              </a:lnSpc>
+            </a:pPr>
+            <a:r>
+              <a:rPr sz="2000" b="0">
+                <a:solidFill>
+                  <a:srgbClr val="333333"/>
+                </a:solidFill>
+                <a:latin typeface="Calibri"/>
+              </a:rPr>
+              <a:t>Match the browser goldens before you claim the checklist</a:t>
+            </a:r>
+          </a:p>
+        </p:txBody>
+      </p:sp>
+      <p:sp>
+        <p:nvSpPr>
+          <p:cNvPr id="4" name="TextBox 3"/>
+          <p:cNvSpPr txBox="1"/>
+          <p:nvPr/>
+        </p:nvSpPr>
+        <p:spPr>
+          <a:xfrm>
+            <a:off x="548640" y="6355080"/>
+            <a:ext cx="11064240" cy="320040"/>
+          </a:xfrm>
+          <a:prstGeom prst="rect">
+            <a:avLst/>
+          </a:prstGeom>
+          <a:noFill/>
+        </p:spPr>
+        <p:txBody>
+          <a:bodyPr wrap="square">
+            <a:noAutofit/>
+          </a:bodyPr>
+          <a:lstStyle/>
+          <a:p>
+            <a:pPr algn="r">
+              <a:lnSpc>
+                <a:spcPts val="2200"/>
+              </a:lnSpc>
+              <a:defRPr sz="1000" b="0">
+                <a:solidFill>
+                  <a:srgbClr val="666666"/>
+                </a:solidFill>
+                <a:latin typeface="Calibri"/>
+              </a:defRPr>
+            </a:pPr>
+            <a:r>
+              <a:t>learn_partitioning — 01 cutsize balance</a:t>
+            </a:r>
+          </a:p>
+        </p:txBody>
+      </p:sp>
+    </p:spTree>
+  </p:cSld>
+  <p:clrMapOvr>
+    <a:masterClrMapping/>
+  </p:clrMapOvr>
+</p:sld>
+</file>
+
+<file path=ppt/slides/slide13.xml><?xml version="1.0" encoding="utf-8"?>
+<p:sld xmlns:a="http://schemas.openxmlformats.org/drawingml/2006/main" xmlns:p="http://schemas.openxmlformats.org/presentationml/2006/main" xmlns:r="http://schemas.openxmlformats.org/officeDocument/2006/relationships">
+  <p:cSld>
+    <p:spTree>
+      <p:nvGrpSpPr>
+        <p:cNvPr id="1" name=""/>
+        <p:cNvGrpSpPr/>
+        <p:nvPr/>
+      </p:nvGrpSpPr>
+      <p:grpSpPr/>
+      <p:sp>
+        <p:nvSpPr>
+          <p:cNvPr id="2" name="TextBox 1"/>
+          <p:cNvSpPr txBox="1"/>
+          <p:nvPr/>
+        </p:nvSpPr>
+        <p:spPr>
+          <a:xfrm>
+            <a:off x="548640" y="411480"/>
+            <a:ext cx="11064240" cy="777240"/>
+          </a:xfrm>
+          <a:prstGeom prst="rect">
+            <a:avLst/>
+          </a:prstGeom>
+          <a:noFill/>
+        </p:spPr>
+        <p:txBody>
+          <a:bodyPr wrap="square">
+            <a:noAutofit/>
+          </a:bodyPr>
+          <a:lstStyle/>
+          <a:p>
+            <a:pPr>
+              <a:lnSpc>
+                <a:spcPts val="2200"/>
+              </a:lnSpc>
+            </a:pPr>
+            <a:r>
+              <a:rPr sz="2800" b="1">
+                <a:solidFill>
+                  <a:srgbClr val="1A1A2E"/>
+                </a:solidFill>
+                <a:latin typeface="Calibri"/>
+              </a:rPr>
+              <a:t>Pitfalls</a:t>
+            </a:r>
+          </a:p>
+        </p:txBody>
+      </p:sp>
+      <p:sp>
+        <p:nvSpPr>
+          <p:cNvPr id="3" name="TextBox 2"/>
+          <p:cNvSpPr txBox="1"/>
+          <p:nvPr/>
+        </p:nvSpPr>
+        <p:spPr>
+          <a:xfrm>
+            <a:off x="548640" y="1234440"/>
+            <a:ext cx="11064240" cy="4937760"/>
+          </a:xfrm>
+          <a:prstGeom prst="rect">
+            <a:avLst/>
+          </a:prstGeom>
+          <a:noFill/>
+        </p:spPr>
+        <p:txBody>
+          <a:bodyPr wrap="square">
+            <a:noAutofit/>
+          </a:bodyPr>
+          <a:lstStyle/>
+          <a:p>
+            <a:pPr lvl="0" marL="457200" indent="-228600">
+              <a:buFont typeface="Calibri"/>
+              <a:spcAft>
+                <a:spcPts val="1000"/>
+              </a:spcAft>
+              <a:buSzPct val="100000"/>
+              <a:buChar char="•"/>
+              <a:lnSpc>
+                <a:spcPts val="2200"/>
+              </a:lnSpc>
+            </a:pPr>
+            <a:r>
+              <a:rPr sz="2000" b="0">
+                <a:solidFill>
+                  <a:srgbClr val="333333"/>
+                </a:solidFill>
+                <a:latin typeface="Calibri"/>
+              </a:rPr>
+              <a:t>Common traps</a:t>
+            </a:r>
+          </a:p>
+          <a:p>
+            <a:pPr lvl="0" marL="457200" indent="-228600">
+              <a:buFont typeface="Calibri"/>
+              <a:spcAft>
+                <a:spcPts val="1000"/>
+              </a:spcAft>
+              <a:buSzPct val="100000"/>
+              <a:buChar char="•"/>
+              <a:lnSpc>
+                <a:spcPts val="2200"/>
+              </a:lnSpc>
+            </a:pPr>
+            <a:r>
+              <a:rPr sz="2000" b="0">
+                <a:solidFill>
+                  <a:srgbClr val="333333"/>
+                </a:solidFill>
+                <a:latin typeface="Calibri"/>
+              </a:rPr>
+              <a:t>For multilevel flows, verify coarsening before you blame the refiner</a:t>
+            </a:r>
+          </a:p>
+        </p:txBody>
+      </p:sp>
+      <p:sp>
+        <p:nvSpPr>
+          <p:cNvPr id="4" name="TextBox 3"/>
+          <p:cNvSpPr txBox="1"/>
+          <p:nvPr/>
+        </p:nvSpPr>
+        <p:spPr>
+          <a:xfrm>
+            <a:off x="548640" y="6355080"/>
+            <a:ext cx="11064240" cy="320040"/>
+          </a:xfrm>
+          <a:prstGeom prst="rect">
+            <a:avLst/>
+          </a:prstGeom>
+          <a:noFill/>
+        </p:spPr>
+        <p:txBody>
+          <a:bodyPr wrap="square">
+            <a:noAutofit/>
+          </a:bodyPr>
+          <a:lstStyle/>
+          <a:p>
+            <a:pPr algn="r">
+              <a:lnSpc>
+                <a:spcPts val="2200"/>
+              </a:lnSpc>
+              <a:defRPr sz="1000" b="0">
+                <a:solidFill>
+                  <a:srgbClr val="666666"/>
+                </a:solidFill>
+                <a:latin typeface="Calibri"/>
+              </a:defRPr>
+            </a:pPr>
+            <a:r>
+              <a:t>learn_partitioning — 01 cutsize balance</a:t>
+            </a:r>
+          </a:p>
+        </p:txBody>
+      </p:sp>
+    </p:spTree>
+  </p:cSld>
+  <p:clrMapOvr>
+    <a:masterClrMapping/>
+  </p:clrMapOvr>
+</p:sld>
+</file>
+
+<file path=ppt/slides/slide14.xml><?xml version="1.0" encoding="utf-8"?>
+<p:sld xmlns:a="http://schemas.openxmlformats.org/drawingml/2006/main" xmlns:p="http://schemas.openxmlformats.org/presentationml/2006/main" xmlns:r="http://schemas.openxmlformats.org/officeDocument/2006/relationships">
+  <p:cSld>
+    <p:spTree>
+      <p:nvGrpSpPr>
+        <p:cNvPr id="1" name=""/>
+        <p:cNvGrpSpPr/>
+        <p:nvPr/>
+      </p:nvGrpSpPr>
+      <p:grpSpPr/>
+      <p:sp>
+        <p:nvSpPr>
+          <p:cNvPr id="2" name="TextBox 1"/>
+          <p:cNvSpPr txBox="1"/>
+          <p:nvPr/>
+        </p:nvSpPr>
+        <p:spPr>
+          <a:xfrm>
+            <a:off x="548640" y="411480"/>
+            <a:ext cx="11064240" cy="777240"/>
+          </a:xfrm>
+          <a:prstGeom prst="rect">
+            <a:avLst/>
+          </a:prstGeom>
+          <a:noFill/>
+        </p:spPr>
+        <p:txBody>
+          <a:bodyPr wrap="square">
+            <a:noAutofit/>
+          </a:bodyPr>
+          <a:lstStyle/>
+          <a:p>
+            <a:pPr>
+              <a:lnSpc>
+                <a:spcPts val="2200"/>
+              </a:lnSpc>
+            </a:pPr>
+            <a:r>
+              <a:rPr sz="2800" b="1">
+                <a:solidFill>
+                  <a:srgbClr val="1A1A2E"/>
+                </a:solidFill>
+                <a:latin typeface="Calibri"/>
+              </a:rPr>
               <a:t>Your turn</a:t>
             </a:r>
           </a:p>
@@ -4822,6 +5506,125 @@
               <a:t>Never celebrate a zero cut that parks every node on one side</a:t>
             </a:r>
           </a:p>
+        </p:txBody>
+      </p:sp>
+      <p:sp>
+        <p:nvSpPr>
+          <p:cNvPr id="4" name="TextBox 3"/>
+          <p:cNvSpPr txBox="1"/>
+          <p:nvPr/>
+        </p:nvSpPr>
+        <p:spPr>
+          <a:xfrm>
+            <a:off x="548640" y="6355080"/>
+            <a:ext cx="11064240" cy="320040"/>
+          </a:xfrm>
+          <a:prstGeom prst="rect">
+            <a:avLst/>
+          </a:prstGeom>
+          <a:noFill/>
+        </p:spPr>
+        <p:txBody>
+          <a:bodyPr wrap="square">
+            <a:noAutofit/>
+          </a:bodyPr>
+          <a:lstStyle/>
+          <a:p>
+            <a:pPr algn="r">
+              <a:lnSpc>
+                <a:spcPts val="2200"/>
+              </a:lnSpc>
+              <a:defRPr sz="1000" b="0">
+                <a:solidFill>
+                  <a:srgbClr val="666666"/>
+                </a:solidFill>
+                <a:latin typeface="Calibri"/>
+              </a:defRPr>
+            </a:pPr>
+            <a:r>
+              <a:t>learn_partitioning — 01 cutsize balance</a:t>
+            </a:r>
+          </a:p>
+        </p:txBody>
+      </p:sp>
+    </p:spTree>
+  </p:cSld>
+  <p:clrMapOvr>
+    <a:masterClrMapping/>
+  </p:clrMapOvr>
+</p:sld>
+</file>
+
+<file path=ppt/slides/slide3.xml><?xml version="1.0" encoding="utf-8"?>
+<p:sld xmlns:a="http://schemas.openxmlformats.org/drawingml/2006/main" xmlns:p="http://schemas.openxmlformats.org/presentationml/2006/main" xmlns:r="http://schemas.openxmlformats.org/officeDocument/2006/relationships">
+  <p:cSld>
+    <p:spTree>
+      <p:nvGrpSpPr>
+        <p:cNvPr id="1" name=""/>
+        <p:cNvGrpSpPr/>
+        <p:nvPr/>
+      </p:nvGrpSpPr>
+      <p:grpSpPr/>
+      <p:sp>
+        <p:nvSpPr>
+          <p:cNvPr id="2" name="TextBox 1"/>
+          <p:cNvSpPr txBox="1"/>
+          <p:nvPr/>
+        </p:nvSpPr>
+        <p:spPr>
+          <a:xfrm>
+            <a:off x="548640" y="411480"/>
+            <a:ext cx="11064240" cy="777240"/>
+          </a:xfrm>
+          <a:prstGeom prst="rect">
+            <a:avLst/>
+          </a:prstGeom>
+          <a:noFill/>
+        </p:spPr>
+        <p:txBody>
+          <a:bodyPr wrap="square">
+            <a:noAutofit/>
+          </a:bodyPr>
+          <a:lstStyle/>
+          <a:p>
+            <a:pPr>
+              <a:lnSpc>
+                <a:spcPts val="2200"/>
+              </a:lnSpc>
+            </a:pPr>
+            <a:r>
+              <a:rPr sz="2800" b="1">
+                <a:solidFill>
+                  <a:srgbClr val="1A1A2E"/>
+                </a:solidFill>
+                <a:latin typeface="Calibri"/>
+              </a:rPr>
+              <a:t>Pseudocode</a:t>
+            </a:r>
+          </a:p>
+        </p:txBody>
+      </p:sp>
+      <p:sp>
+        <p:nvSpPr>
+          <p:cNvPr id="3" name="TextBox 2"/>
+          <p:cNvSpPr txBox="1"/>
+          <p:nvPr/>
+        </p:nvSpPr>
+        <p:spPr>
+          <a:xfrm>
+            <a:off x="548640" y="1234440"/>
+            <a:ext cx="11064240" cy="4937760"/>
+          </a:xfrm>
+          <a:prstGeom prst="rect">
+            <a:avLst/>
+          </a:prstGeom>
+          <a:noFill/>
+        </p:spPr>
+        <p:txBody>
+          <a:bodyPr wrap="square">
+            <a:noAutofit/>
+          </a:bodyPr>
+          <a:lstStyle/>
           <a:p>
             <a:pPr lvl="0" marL="457200" indent="-228600">
               <a:buFont typeface="Calibri"/>
@@ -4841,7 +5644,95 @@
                 </a:solidFill>
                 <a:latin typeface="Calibri"/>
               </a:rPr>
-              <a:t>&lt;!-- algorithm-walkthrough --&gt;</a:t>
+              <a:t>Before any refinement, write the metrics</a:t>
+            </a:r>
+          </a:p>
+          <a:p>
+            <a:pPr lvl="0" marL="457200" indent="-228600">
+              <a:buFont typeface="Calibri"/>
+              <a:spcAft>
+                <a:spcPts val="1000"/>
+              </a:spcAft>
+              <a:buSzPct val="100000"/>
+              <a:buChar char="•"/>
+              <a:lnSpc>
+                <a:spcPts val="2200"/>
+              </a:lnSpc>
+            </a:pPr>
+            <a:r>
+              <a:rPr sz="2000" b="0">
+                <a:solidFill>
+                  <a:srgbClr val="333333"/>
+                </a:solidFill>
+                <a:latin typeface="Calibri"/>
+              </a:rPr>
+              <a:t>Pseudocode sums cut edges for cutsize and part sizes for balance</a:t>
+            </a:r>
+          </a:p>
+          <a:p>
+            <a:pPr lvl="0" marL="457200" indent="-228600">
+              <a:buFont typeface="Calibri"/>
+              <a:spcAft>
+                <a:spcPts val="1000"/>
+              </a:spcAft>
+              <a:buSzPct val="100000"/>
+              <a:buChar char="•"/>
+              <a:lnSpc>
+                <a:spcPts val="2200"/>
+              </a:lnSpc>
+            </a:pPr>
+            <a:r>
+              <a:rPr sz="2000" b="0">
+                <a:solidFill>
+                  <a:srgbClr val="333333"/>
+                </a:solidFill>
+                <a:latin typeface="Calibri"/>
+              </a:rPr>
+              <a:t>Imbalance is the absolute size gap over total size</a:t>
+            </a:r>
+          </a:p>
+          <a:p>
+            <a:pPr lvl="0" marL="457200" indent="-228600">
+              <a:buFont typeface="Calibri"/>
+              <a:spcAft>
+                <a:spcPts val="1000"/>
+              </a:spcAft>
+              <a:buSzPct val="100000"/>
+              <a:buChar char="•"/>
+              <a:lnSpc>
+                <a:spcPts val="2200"/>
+              </a:lnSpc>
+            </a:pPr>
+            <a:r>
+              <a:rPr sz="2000" b="0">
+                <a:solidFill>
+                  <a:srgbClr val="333333"/>
+                </a:solidFill>
+                <a:latin typeface="Calibri"/>
+              </a:rPr>
+              <a:t>Open this module's examples file and find the Pseudocode section</a:t>
+            </a:r>
+          </a:p>
+          <a:p>
+            <a:pPr lvl="0" marL="457200" indent="-228600">
+              <a:buFont typeface="Calibri"/>
+              <a:spcAft>
+                <a:spcPts val="1000"/>
+              </a:spcAft>
+              <a:buSzPct val="100000"/>
+              <a:buChar char="•"/>
+              <a:lnSpc>
+                <a:spcPts val="2200"/>
+              </a:lnSpc>
+            </a:pPr>
+            <a:r>
+              <a:rPr sz="2000" b="0">
+                <a:solidFill>
+                  <a:srgbClr val="333333"/>
+                </a:solidFill>
+                <a:latin typeface="Calibri"/>
+              </a:rPr>
+              <a:t>That written sketch is what you implement on the implement track and what the browser</a:t>
             </a:r>
           </a:p>
         </p:txBody>
@@ -4893,7 +5784,424 @@
 </p:sld>
 </file>
 
-<file path=ppt/slides/slide3.xml><?xml version="1.0" encoding="utf-8"?>
+<file path=ppt/slides/slide4.xml><?xml version="1.0" encoding="utf-8"?>
+<p:sld xmlns:a="http://schemas.openxmlformats.org/drawingml/2006/main" xmlns:p="http://schemas.openxmlformats.org/presentationml/2006/main" xmlns:r="http://schemas.openxmlformats.org/officeDocument/2006/relationships">
+  <p:cSld>
+    <p:spTree>
+      <p:nvGrpSpPr>
+        <p:cNvPr id="1" name=""/>
+        <p:cNvGrpSpPr/>
+        <p:nvPr/>
+      </p:nvGrpSpPr>
+      <p:grpSpPr/>
+      <p:sp>
+        <p:nvSpPr>
+          <p:cNvPr id="2" name="TextBox 1"/>
+          <p:cNvSpPr txBox="1"/>
+          <p:nvPr/>
+        </p:nvSpPr>
+        <p:spPr>
+          <a:xfrm>
+            <a:off x="548640" y="411480"/>
+            <a:ext cx="11064240" cy="777240"/>
+          </a:xfrm>
+          <a:prstGeom prst="rect">
+            <a:avLst/>
+          </a:prstGeom>
+          <a:noFill/>
+        </p:spPr>
+        <p:txBody>
+          <a:bodyPr wrap="square">
+            <a:noAutofit/>
+          </a:bodyPr>
+          <a:lstStyle/>
+          <a:p>
+            <a:pPr>
+              <a:lnSpc>
+                <a:spcPts val="2200"/>
+              </a:lnSpc>
+            </a:pPr>
+            <a:r>
+              <a:rPr sz="2800" b="1">
+                <a:solidFill>
+                  <a:srgbClr val="1A1A2E"/>
+                </a:solidFill>
+                <a:latin typeface="Calibri"/>
+              </a:rPr>
+              <a:t>Algorithm sketch</a:t>
+            </a:r>
+          </a:p>
+        </p:txBody>
+      </p:sp>
+      <p:sp>
+        <p:nvSpPr>
+          <p:cNvPr id="3" name="TextBox 2"/>
+          <p:cNvSpPr txBox="1"/>
+          <p:nvPr/>
+        </p:nvSpPr>
+        <p:spPr>
+          <a:xfrm>
+            <a:off x="548640" y="1234440"/>
+            <a:ext cx="11064240" cy="4937760"/>
+          </a:xfrm>
+          <a:prstGeom prst="rect">
+            <a:avLst/>
+          </a:prstGeom>
+          <a:noFill/>
+        </p:spPr>
+        <p:txBody>
+          <a:bodyPr wrap="square">
+            <a:noAutofit/>
+          </a:bodyPr>
+          <a:lstStyle/>
+          <a:p>
+            <a:pPr lvl="0" marL="457200" indent="-228600">
+              <a:buFont typeface="Calibri"/>
+              <a:spcAft>
+                <a:spcPts val="1000"/>
+              </a:spcAft>
+              <a:buSzPct val="100000"/>
+              <a:buChar char="•"/>
+              <a:lnSpc>
+                <a:spcPts val="2200"/>
+              </a:lnSpc>
+            </a:pPr>
+            <a:r>
+              <a:rPr sz="2000" b="0">
+                <a:solidFill>
+                  <a:srgbClr val="333333"/>
+                </a:solidFill>
+                <a:latin typeface="Calibri"/>
+              </a:rPr>
+              <a:t>Bad seed AE versus BCD cuts both heavy edges for cutsize twelve</a:t>
+            </a:r>
+          </a:p>
+          <a:p>
+            <a:pPr lvl="0" marL="457200" indent="-228600">
+              <a:buFont typeface="Calibri"/>
+              <a:spcAft>
+                <a:spcPts val="1000"/>
+              </a:spcAft>
+              <a:buSzPct val="100000"/>
+              <a:buChar char="•"/>
+              <a:lnSpc>
+                <a:spcPts val="2200"/>
+              </a:lnSpc>
+            </a:pPr>
+            <a:r>
+              <a:rPr sz="2000" b="0">
+                <a:solidFill>
+                  <a:srgbClr val="333333"/>
+                </a:solidFill>
+                <a:latin typeface="Calibri"/>
+              </a:rPr>
+              <a:t>Golden ABC versus DE drops the cut to three with sizes three and two</a:t>
+            </a:r>
+          </a:p>
+        </p:txBody>
+      </p:sp>
+      <p:sp>
+        <p:nvSpPr>
+          <p:cNvPr id="4" name="TextBox 3"/>
+          <p:cNvSpPr txBox="1"/>
+          <p:nvPr/>
+        </p:nvSpPr>
+        <p:spPr>
+          <a:xfrm>
+            <a:off x="548640" y="6355080"/>
+            <a:ext cx="11064240" cy="320040"/>
+          </a:xfrm>
+          <a:prstGeom prst="rect">
+            <a:avLst/>
+          </a:prstGeom>
+          <a:noFill/>
+        </p:spPr>
+        <p:txBody>
+          <a:bodyPr wrap="square">
+            <a:noAutofit/>
+          </a:bodyPr>
+          <a:lstStyle/>
+          <a:p>
+            <a:pPr algn="r">
+              <a:lnSpc>
+                <a:spcPts val="2200"/>
+              </a:lnSpc>
+              <a:defRPr sz="1000" b="0">
+                <a:solidFill>
+                  <a:srgbClr val="666666"/>
+                </a:solidFill>
+                <a:latin typeface="Calibri"/>
+              </a:defRPr>
+            </a:pPr>
+            <a:r>
+              <a:t>learn_partitioning — 01 cutsize balance</a:t>
+            </a:r>
+          </a:p>
+        </p:txBody>
+      </p:sp>
+    </p:spTree>
+  </p:cSld>
+  <p:clrMapOvr>
+    <a:masterClrMapping/>
+  </p:clrMapOvr>
+</p:sld>
+</file>
+
+<file path=ppt/slides/slide5.xml><?xml version="1.0" encoding="utf-8"?>
+<p:sld xmlns:a="http://schemas.openxmlformats.org/drawingml/2006/main" xmlns:p="http://schemas.openxmlformats.org/presentationml/2006/main" xmlns:r="http://schemas.openxmlformats.org/officeDocument/2006/relationships">
+  <p:cSld>
+    <p:spTree>
+      <p:nvGrpSpPr>
+        <p:cNvPr id="1" name=""/>
+        <p:cNvGrpSpPr/>
+        <p:nvPr/>
+      </p:nvGrpSpPr>
+      <p:grpSpPr/>
+      <p:sp>
+        <p:nvSpPr>
+          <p:cNvPr id="2" name="TextBox 1"/>
+          <p:cNvSpPr txBox="1"/>
+          <p:nvPr/>
+        </p:nvSpPr>
+        <p:spPr>
+          <a:xfrm>
+            <a:off x="548640" y="411480"/>
+            <a:ext cx="11064240" cy="777240"/>
+          </a:xfrm>
+          <a:prstGeom prst="rect">
+            <a:avLst/>
+          </a:prstGeom>
+          <a:noFill/>
+        </p:spPr>
+        <p:txBody>
+          <a:bodyPr wrap="square">
+            <a:noAutofit/>
+          </a:bodyPr>
+          <a:lstStyle/>
+          <a:p>
+            <a:pPr>
+              <a:lnSpc>
+                <a:spcPts val="2200"/>
+              </a:lnSpc>
+            </a:pPr>
+            <a:r>
+              <a:rPr sz="2800" b="1">
+                <a:solidFill>
+                  <a:srgbClr val="1A1A2E"/>
+                </a:solidFill>
+                <a:latin typeface="Calibri"/>
+              </a:rPr>
+              <a:t>Algorithm sketch — try these</a:t>
+            </a:r>
+          </a:p>
+        </p:txBody>
+      </p:sp>
+      <p:sp>
+        <p:nvSpPr>
+          <p:cNvPr id="3" name="TextBox 2"/>
+          <p:cNvSpPr txBox="1"/>
+          <p:nvPr/>
+        </p:nvSpPr>
+        <p:spPr>
+          <a:xfrm>
+            <a:off x="548640" y="1143000"/>
+            <a:ext cx="11064240" cy="5029200"/>
+          </a:xfrm>
+          <a:prstGeom prst="rect">
+            <a:avLst/>
+          </a:prstGeom>
+          <a:solidFill>
+            <a:srgbClr val="F4F4F4"/>
+          </a:solidFill>
+        </p:spPr>
+        <p:txBody>
+          <a:bodyPr wrap="square">
+            <a:noAutofit/>
+          </a:bodyPr>
+          <a:lstStyle/>
+          <a:p>
+            <a:pPr>
+              <a:lnSpc>
+                <a:spcPts val="2200"/>
+              </a:lnSpc>
+              <a:spcAft>
+                <a:spcPts val="400"/>
+              </a:spcAft>
+            </a:pPr>
+            <a:r>
+              <a:rPr sz="2000" b="0">
+                <a:solidFill>
+                  <a:srgbClr val="333333"/>
+                </a:solidFill>
+                <a:latin typeface="Consolas"/>
+              </a:rPr>
+              <a:t>INPUT: assignment side[v], weighted edges</a:t>
+            </a:r>
+          </a:p>
+          <a:p>
+            <a:pPr>
+              <a:lnSpc>
+                <a:spcPts val="2200"/>
+              </a:lnSpc>
+              <a:spcAft>
+                <a:spcPts val="400"/>
+              </a:spcAft>
+            </a:pPr>
+            <a:r>
+              <a:rPr sz="2000" b="0">
+                <a:solidFill>
+                  <a:srgbClr val="333333"/>
+                </a:solidFill>
+                <a:latin typeface="Consolas"/>
+              </a:rPr>
+              <a:t>OUTPUT: cutsize, sizes, imbalance</a:t>
+            </a:r>
+          </a:p>
+          <a:p>
+            <a:pPr>
+              <a:lnSpc>
+                <a:spcPts val="2200"/>
+              </a:lnSpc>
+              <a:spcAft>
+                <a:spcPts val="400"/>
+              </a:spcAft>
+            </a:pPr>
+            <a:r>
+              <a:rPr sz="2000" b="0">
+                <a:solidFill>
+                  <a:srgbClr val="333333"/>
+                </a:solidFill>
+                <a:latin typeface="Consolas"/>
+              </a:rPr>
+              <a:t>cut ← Σ w(u,v) where side[u]≠side[v]</a:t>
+            </a:r>
+          </a:p>
+          <a:p>
+            <a:pPr>
+              <a:lnSpc>
+                <a:spcPts val="2200"/>
+              </a:lnSpc>
+              <a:spcAft>
+                <a:spcPts val="400"/>
+              </a:spcAft>
+            </a:pPr>
+            <a:r>
+              <a:rPr sz="2000" b="0">
+                <a:solidFill>
+                  <a:srgbClr val="333333"/>
+                </a:solidFill>
+                <a:latin typeface="Consolas"/>
+              </a:rPr>
+              <a:t>size[p] ← Σ node_size on side p</a:t>
+            </a:r>
+          </a:p>
+          <a:p>
+            <a:pPr>
+              <a:lnSpc>
+                <a:spcPts val="2200"/>
+              </a:lnSpc>
+              <a:spcAft>
+                <a:spcPts val="400"/>
+              </a:spcAft>
+            </a:pPr>
+            <a:r>
+              <a:rPr sz="2000" b="0">
+                <a:solidFill>
+                  <a:srgbClr val="333333"/>
+                </a:solidFill>
+                <a:latin typeface="Consolas"/>
+              </a:rPr>
+              <a:t>imbalance ← |s0−s1| / (s0+s1)</a:t>
+            </a:r>
+          </a:p>
+          <a:p>
+            <a:pPr>
+              <a:lnSpc>
+                <a:spcPts val="2200"/>
+              </a:lnSpc>
+              <a:spcAft>
+                <a:spcPts val="400"/>
+              </a:spcAft>
+            </a:pPr>
+            <a:r>
+              <a:rPr sz="2000" b="0">
+                <a:solidFill>
+                  <a:srgbClr val="333333"/>
+                </a:solidFill>
+                <a:latin typeface="Consolas"/>
+              </a:rPr>
+              <a:t>GOLDEN bad AE|BCD: cut=12, sizes 2|3</a:t>
+            </a:r>
+          </a:p>
+          <a:p>
+            <a:pPr>
+              <a:lnSpc>
+                <a:spcPts val="2200"/>
+              </a:lnSpc>
+              <a:spcAft>
+                <a:spcPts val="400"/>
+              </a:spcAft>
+            </a:pPr>
+            <a:r>
+              <a:rPr sz="2000" b="0">
+                <a:solidFill>
+                  <a:srgbClr val="333333"/>
+                </a:solidFill>
+                <a:latin typeface="Consolas"/>
+              </a:rPr>
+              <a:t>GOLDEN ABC|DE: cut=3, sizes 3|2</a:t>
+            </a:r>
+          </a:p>
+        </p:txBody>
+      </p:sp>
+      <p:sp>
+        <p:nvSpPr>
+          <p:cNvPr id="4" name="TextBox 3"/>
+          <p:cNvSpPr txBox="1"/>
+          <p:nvPr/>
+        </p:nvSpPr>
+        <p:spPr>
+          <a:xfrm>
+            <a:off x="548640" y="6355080"/>
+            <a:ext cx="11064240" cy="320040"/>
+          </a:xfrm>
+          <a:prstGeom prst="rect">
+            <a:avLst/>
+          </a:prstGeom>
+          <a:noFill/>
+        </p:spPr>
+        <p:txBody>
+          <a:bodyPr wrap="square">
+            <a:noAutofit/>
+          </a:bodyPr>
+          <a:lstStyle/>
+          <a:p>
+            <a:pPr algn="r">
+              <a:lnSpc>
+                <a:spcPts val="2200"/>
+              </a:lnSpc>
+              <a:defRPr sz="1000" b="0">
+                <a:solidFill>
+                  <a:srgbClr val="666666"/>
+                </a:solidFill>
+                <a:latin typeface="Calibri"/>
+              </a:defRPr>
+            </a:pPr>
+            <a:r>
+              <a:t>learn_partitioning — 01 cutsize balance</a:t>
+            </a:r>
+          </a:p>
+        </p:txBody>
+      </p:sp>
+    </p:spTree>
+  </p:cSld>
+  <p:clrMapOvr>
+    <a:masterClrMapping/>
+  </p:clrMapOvr>
+</p:sld>
+</file>
+
+<file path=ppt/slides/slide6.xml><?xml version="1.0" encoding="utf-8"?>
 <p:sld xmlns:a="http://schemas.openxmlformats.org/drawingml/2006/main" xmlns:p="http://schemas.openxmlformats.org/presentationml/2006/main" xmlns:r="http://schemas.openxmlformats.org/officeDocument/2006/relationships">
   <p:cSld>
     <p:spTree>
@@ -5052,7 +6360,7 @@
 </p:sld>
 </file>
 
-<file path=ppt/slides/slide4.xml><?xml version="1.0" encoding="utf-8"?>
+<file path=ppt/slides/slide7.xml><?xml version="1.0" encoding="utf-8"?>
 <p:sld xmlns:a="http://schemas.openxmlformats.org/drawingml/2006/main" xmlns:p="http://schemas.openxmlformats.org/presentationml/2006/main" xmlns:r="http://schemas.openxmlformats.org/officeDocument/2006/relationships">
   <p:cSld>
     <p:spTree>
@@ -5211,7 +6519,7 @@
 </p:sld>
 </file>
 
-<file path=ppt/slides/slide5.xml><?xml version="1.0" encoding="utf-8"?>
+<file path=ppt/slides/slide8.xml><?xml version="1.0" encoding="utf-8"?>
 <p:sld xmlns:a="http://schemas.openxmlformats.org/drawingml/2006/main" xmlns:p="http://schemas.openxmlformats.org/presentationml/2006/main" xmlns:r="http://schemas.openxmlformats.org/officeDocument/2006/relationships">
   <p:cSld>
     <p:spTree>
@@ -5370,7 +6678,7 @@
 </p:sld>
 </file>
 
-<file path=ppt/slides/slide6.xml><?xml version="1.0" encoding="utf-8"?>
+<file path=ppt/slides/slide9.xml><?xml version="1.0" encoding="utf-8"?>
 <p:sld xmlns:a="http://schemas.openxmlformats.org/drawingml/2006/main" xmlns:p="http://schemas.openxmlformats.org/presentationml/2006/main" xmlns:r="http://schemas.openxmlformats.org/officeDocument/2006/relationships">
   <p:cSld>
     <p:spTree>
@@ -5485,553 +6793,6 @@
       <p:sp>
         <p:nvSpPr>
           <p:cNvPr id="5" name="TextBox 4"/>
-          <p:cNvSpPr txBox="1"/>
-          <p:nvPr/>
-        </p:nvSpPr>
-        <p:spPr>
-          <a:xfrm>
-            <a:off x="548640" y="6355080"/>
-            <a:ext cx="11064240" cy="320040"/>
-          </a:xfrm>
-          <a:prstGeom prst="rect">
-            <a:avLst/>
-          </a:prstGeom>
-          <a:noFill/>
-        </p:spPr>
-        <p:txBody>
-          <a:bodyPr wrap="square">
-            <a:noAutofit/>
-          </a:bodyPr>
-          <a:lstStyle/>
-          <a:p>
-            <a:pPr algn="r">
-              <a:lnSpc>
-                <a:spcPts val="2200"/>
-              </a:lnSpc>
-              <a:defRPr sz="1000" b="0">
-                <a:solidFill>
-                  <a:srgbClr val="666666"/>
-                </a:solidFill>
-                <a:latin typeface="Calibri"/>
-              </a:defRPr>
-            </a:pPr>
-            <a:r>
-              <a:t>learn_partitioning — 01 cutsize balance</a:t>
-            </a:r>
-          </a:p>
-        </p:txBody>
-      </p:sp>
-    </p:spTree>
-  </p:cSld>
-  <p:clrMapOvr>
-    <a:masterClrMapping/>
-  </p:clrMapOvr>
-</p:sld>
-</file>
-
-<file path=ppt/slides/slide7.xml><?xml version="1.0" encoding="utf-8"?>
-<p:sld xmlns:a="http://schemas.openxmlformats.org/drawingml/2006/main" xmlns:p="http://schemas.openxmlformats.org/presentationml/2006/main" xmlns:r="http://schemas.openxmlformats.org/officeDocument/2006/relationships">
-  <p:cSld>
-    <p:spTree>
-      <p:nvGrpSpPr>
-        <p:cNvPr id="1" name=""/>
-        <p:cNvGrpSpPr/>
-        <p:nvPr/>
-      </p:nvGrpSpPr>
-      <p:grpSpPr/>
-      <p:sp>
-        <p:nvSpPr>
-          <p:cNvPr id="2" name="TextBox 1"/>
-          <p:cNvSpPr txBox="1"/>
-          <p:nvPr/>
-        </p:nvSpPr>
-        <p:spPr>
-          <a:xfrm>
-            <a:off x="548640" y="411480"/>
-            <a:ext cx="11064240" cy="777240"/>
-          </a:xfrm>
-          <a:prstGeom prst="rect">
-            <a:avLst/>
-          </a:prstGeom>
-          <a:noFill/>
-        </p:spPr>
-        <p:txBody>
-          <a:bodyPr wrap="square">
-            <a:noAutofit/>
-          </a:bodyPr>
-          <a:lstStyle/>
-          <a:p>
-            <a:pPr>
-              <a:lnSpc>
-                <a:spcPts val="2200"/>
-              </a:lnSpc>
-            </a:pPr>
-            <a:r>
-              <a:rPr sz="2800" b="1">
-                <a:solidFill>
-                  <a:srgbClr val="1A1A2E"/>
-                </a:solidFill>
-                <a:latin typeface="Calibri"/>
-              </a:rPr>
-              <a:t>Cutsize + balance literacy</a:t>
-            </a:r>
-          </a:p>
-        </p:txBody>
-      </p:sp>
-      <p:pic>
-        <p:nvPicPr>
-          <p:cNvPr id="3" name="Picture 2" descr="05-takeaway.png"/>
-          <p:cNvPicPr>
-            <a:picLocks noChangeAspect="1"/>
-          </p:cNvPicPr>
-          <p:nvPr/>
-        </p:nvPicPr>
-        <p:blipFill>
-          <a:blip r:embed="rId2"/>
-          <a:stretch>
-            <a:fillRect/>
-          </a:stretch>
-        </p:blipFill>
-        <p:spPr>
-          <a:xfrm>
-            <a:off x="548640" y="1143000"/>
-            <a:ext cx="9404113" cy="4572000"/>
-          </a:xfrm>
-          <a:prstGeom prst="rect">
-            <a:avLst/>
-          </a:prstGeom>
-        </p:spPr>
-      </p:pic>
-      <p:sp>
-        <p:nvSpPr>
-          <p:cNvPr id="4" name="TextBox 3"/>
-          <p:cNvSpPr txBox="1"/>
-          <p:nvPr/>
-        </p:nvSpPr>
-        <p:spPr>
-          <a:xfrm>
-            <a:off x="548640" y="5897880"/>
-            <a:ext cx="11064240" cy="411480"/>
-          </a:xfrm>
-          <a:prstGeom prst="rect">
-            <a:avLst/>
-          </a:prstGeom>
-          <a:noFill/>
-        </p:spPr>
-        <p:txBody>
-          <a:bodyPr wrap="square">
-            <a:noAutofit/>
-          </a:bodyPr>
-          <a:lstStyle/>
-          <a:p>
-            <a:pPr>
-              <a:lnSpc>
-                <a:spcPts val="2200"/>
-              </a:lnSpc>
-            </a:pPr>
-            <a:r>
-              <a:rPr sz="1200" b="0">
-                <a:solidFill>
-                  <a:srgbClr val="333333"/>
-                </a:solidFill>
-                <a:latin typeface="Calibri"/>
-              </a:rPr>
-              <a:t>Cutsize + balance literacy</a:t>
-            </a:r>
-          </a:p>
-        </p:txBody>
-      </p:sp>
-      <p:sp>
-        <p:nvSpPr>
-          <p:cNvPr id="5" name="TextBox 4"/>
-          <p:cNvSpPr txBox="1"/>
-          <p:nvPr/>
-        </p:nvSpPr>
-        <p:spPr>
-          <a:xfrm>
-            <a:off x="548640" y="6355080"/>
-            <a:ext cx="11064240" cy="320040"/>
-          </a:xfrm>
-          <a:prstGeom prst="rect">
-            <a:avLst/>
-          </a:prstGeom>
-          <a:noFill/>
-        </p:spPr>
-        <p:txBody>
-          <a:bodyPr wrap="square">
-            <a:noAutofit/>
-          </a:bodyPr>
-          <a:lstStyle/>
-          <a:p>
-            <a:pPr algn="r">
-              <a:lnSpc>
-                <a:spcPts val="2200"/>
-              </a:lnSpc>
-              <a:defRPr sz="1000" b="0">
-                <a:solidFill>
-                  <a:srgbClr val="666666"/>
-                </a:solidFill>
-                <a:latin typeface="Calibri"/>
-              </a:defRPr>
-            </a:pPr>
-            <a:r>
-              <a:t>learn_partitioning — 01 cutsize balance</a:t>
-            </a:r>
-          </a:p>
-        </p:txBody>
-      </p:sp>
-    </p:spTree>
-  </p:cSld>
-  <p:clrMapOvr>
-    <a:masterClrMapping/>
-  </p:clrMapOvr>
-</p:sld>
-</file>
-
-<file path=ppt/slides/slide8.xml><?xml version="1.0" encoding="utf-8"?>
-<p:sld xmlns:a="http://schemas.openxmlformats.org/drawingml/2006/main" xmlns:p="http://schemas.openxmlformats.org/presentationml/2006/main" xmlns:r="http://schemas.openxmlformats.org/officeDocument/2006/relationships">
-  <p:cSld>
-    <p:spTree>
-      <p:nvGrpSpPr>
-        <p:cNvPr id="1" name=""/>
-        <p:cNvGrpSpPr/>
-        <p:nvPr/>
-      </p:nvGrpSpPr>
-      <p:grpSpPr/>
-      <p:sp>
-        <p:nvSpPr>
-          <p:cNvPr id="2" name="TextBox 1"/>
-          <p:cNvSpPr txBox="1"/>
-          <p:nvPr/>
-        </p:nvSpPr>
-        <p:spPr>
-          <a:xfrm>
-            <a:off x="548640" y="411480"/>
-            <a:ext cx="11064240" cy="777240"/>
-          </a:xfrm>
-          <a:prstGeom prst="rect">
-            <a:avLst/>
-          </a:prstGeom>
-          <a:noFill/>
-        </p:spPr>
-        <p:txBody>
-          <a:bodyPr wrap="square">
-            <a:noAutofit/>
-          </a:bodyPr>
-          <a:lstStyle/>
-          <a:p>
-            <a:pPr>
-              <a:lnSpc>
-                <a:spcPts val="2200"/>
-              </a:lnSpc>
-            </a:pPr>
-            <a:r>
-              <a:rPr sz="2800" b="1">
-                <a:solidFill>
-                  <a:srgbClr val="1A1A2E"/>
-                </a:solidFill>
-                <a:latin typeface="Calibri"/>
-              </a:rPr>
-              <a:t>Browser lab track</a:t>
-            </a:r>
-          </a:p>
-        </p:txBody>
-      </p:sp>
-      <p:sp>
-        <p:nvSpPr>
-          <p:cNvPr id="3" name="TextBox 2"/>
-          <p:cNvSpPr txBox="1"/>
-          <p:nvPr/>
-        </p:nvSpPr>
-        <p:spPr>
-          <a:xfrm>
-            <a:off x="548640" y="1234440"/>
-            <a:ext cx="11064240" cy="4937760"/>
-          </a:xfrm>
-          <a:prstGeom prst="rect">
-            <a:avLst/>
-          </a:prstGeom>
-          <a:noFill/>
-        </p:spPr>
-        <p:txBody>
-          <a:bodyPr wrap="square">
-            <a:noAutofit/>
-          </a:bodyPr>
-          <a:lstStyle/>
-          <a:p>
-            <a:pPr lvl="0" marL="457200" indent="-228600">
-              <a:buFont typeface="Calibri"/>
-              <a:spcAft>
-                <a:spcPts val="1000"/>
-              </a:spcAft>
-              <a:buSzPct val="100000"/>
-              <a:buChar char="•"/>
-              <a:lnSpc>
-                <a:spcPts val="2200"/>
-              </a:lnSpc>
-            </a:pPr>
-            <a:r>
-              <a:rPr sz="2000" b="0">
-                <a:solidFill>
-                  <a:srgbClr val="333333"/>
-                </a:solidFill>
-                <a:latin typeface="Calibri"/>
-              </a:rPr>
-              <a:t>In the browser lab track, open the </a:t>
-            </a:r>
-            <a:r>
-              <a:rPr sz="2000" b="1">
-                <a:solidFill>
-                  <a:srgbClr val="333333"/>
-                </a:solidFill>
-                <a:latin typeface="Calibri"/>
-              </a:rPr>
-              <a:t>cutsize-balance</a:t>
-            </a:r>
-            <a:r>
-              <a:rPr sz="2000" b="0">
-                <a:solidFill>
-                  <a:srgbClr val="333333"/>
-                </a:solidFill>
-                <a:latin typeface="Calibri"/>
-              </a:rPr>
-              <a:t> lab from the tools shelf</a:t>
-            </a:r>
-          </a:p>
-          <a:p>
-            <a:pPr lvl="0" marL="457200" indent="-228600">
-              <a:buFont typeface="Calibri"/>
-              <a:spcAft>
-                <a:spcPts val="1000"/>
-              </a:spcAft>
-              <a:buSzPct val="100000"/>
-              <a:buChar char="•"/>
-              <a:lnSpc>
-                <a:spcPts val="2200"/>
-              </a:lnSpc>
-            </a:pPr>
-            <a:r>
-              <a:rPr sz="2000" b="0">
-                <a:solidFill>
-                  <a:srgbClr val="333333"/>
-                </a:solidFill>
-                <a:latin typeface="Calibri"/>
-              </a:rPr>
-              <a:t>Load the starter graph, run the algorithm once</a:t>
-            </a:r>
-          </a:p>
-          <a:p>
-            <a:pPr lvl="0" marL="457200" indent="-228600">
-              <a:buFont typeface="Calibri"/>
-              <a:spcAft>
-                <a:spcPts val="1000"/>
-              </a:spcAft>
-              <a:buSzPct val="100000"/>
-              <a:buChar char="•"/>
-              <a:lnSpc>
-                <a:spcPts val="2200"/>
-              </a:lnSpc>
-            </a:pPr>
-            <a:r>
-              <a:rPr sz="2000" b="0">
-                <a:solidFill>
-                  <a:srgbClr val="333333"/>
-                </a:solidFill>
-                <a:latin typeface="Calibri"/>
-              </a:rPr>
-              <a:t>Work the challenges that lock the goldens</a:t>
-            </a:r>
-          </a:p>
-        </p:txBody>
-      </p:sp>
-      <p:sp>
-        <p:nvSpPr>
-          <p:cNvPr id="4" name="TextBox 3"/>
-          <p:cNvSpPr txBox="1"/>
-          <p:nvPr/>
-        </p:nvSpPr>
-        <p:spPr>
-          <a:xfrm>
-            <a:off x="548640" y="6355080"/>
-            <a:ext cx="11064240" cy="320040"/>
-          </a:xfrm>
-          <a:prstGeom prst="rect">
-            <a:avLst/>
-          </a:prstGeom>
-          <a:noFill/>
-        </p:spPr>
-        <p:txBody>
-          <a:bodyPr wrap="square">
-            <a:noAutofit/>
-          </a:bodyPr>
-          <a:lstStyle/>
-          <a:p>
-            <a:pPr algn="r">
-              <a:lnSpc>
-                <a:spcPts val="2200"/>
-              </a:lnSpc>
-              <a:defRPr sz="1000" b="0">
-                <a:solidFill>
-                  <a:srgbClr val="666666"/>
-                </a:solidFill>
-                <a:latin typeface="Calibri"/>
-              </a:defRPr>
-            </a:pPr>
-            <a:r>
-              <a:t>learn_partitioning — 01 cutsize balance</a:t>
-            </a:r>
-          </a:p>
-        </p:txBody>
-      </p:sp>
-    </p:spTree>
-  </p:cSld>
-  <p:clrMapOvr>
-    <a:masterClrMapping/>
-  </p:clrMapOvr>
-</p:sld>
-</file>
-
-<file path=ppt/slides/slide9.xml><?xml version="1.0" encoding="utf-8"?>
-<p:sld xmlns:a="http://schemas.openxmlformats.org/drawingml/2006/main" xmlns:p="http://schemas.openxmlformats.org/presentationml/2006/main" xmlns:r="http://schemas.openxmlformats.org/officeDocument/2006/relationships">
-  <p:cSld>
-    <p:spTree>
-      <p:nvGrpSpPr>
-        <p:cNvPr id="1" name=""/>
-        <p:cNvGrpSpPr/>
-        <p:nvPr/>
-      </p:nvGrpSpPr>
-      <p:grpSpPr/>
-      <p:sp>
-        <p:nvSpPr>
-          <p:cNvPr id="2" name="TextBox 1"/>
-          <p:cNvSpPr txBox="1"/>
-          <p:nvPr/>
-        </p:nvSpPr>
-        <p:spPr>
-          <a:xfrm>
-            <a:off x="548640" y="411480"/>
-            <a:ext cx="11064240" cy="777240"/>
-          </a:xfrm>
-          <a:prstGeom prst="rect">
-            <a:avLst/>
-          </a:prstGeom>
-          <a:noFill/>
-        </p:spPr>
-        <p:txBody>
-          <a:bodyPr wrap="square">
-            <a:noAutofit/>
-          </a:bodyPr>
-          <a:lstStyle/>
-          <a:p>
-            <a:pPr>
-              <a:lnSpc>
-                <a:spcPts val="2200"/>
-              </a:lnSpc>
-            </a:pPr>
-            <a:r>
-              <a:rPr sz="2800" b="1">
-                <a:solidFill>
-                  <a:srgbClr val="1A1A2E"/>
-                </a:solidFill>
-                <a:latin typeface="Calibri"/>
-              </a:rPr>
-              <a:t>Implement track</a:t>
-            </a:r>
-          </a:p>
-        </p:txBody>
-      </p:sp>
-      <p:sp>
-        <p:nvSpPr>
-          <p:cNvPr id="3" name="TextBox 2"/>
-          <p:cNvSpPr txBox="1"/>
-          <p:nvPr/>
-        </p:nvSpPr>
-        <p:spPr>
-          <a:xfrm>
-            <a:off x="548640" y="1234440"/>
-            <a:ext cx="11064240" cy="4937760"/>
-          </a:xfrm>
-          <a:prstGeom prst="rect">
-            <a:avLst/>
-          </a:prstGeom>
-          <a:noFill/>
-        </p:spPr>
-        <p:txBody>
-          <a:bodyPr wrap="square">
-            <a:noAutofit/>
-          </a:bodyPr>
-          <a:lstStyle/>
-          <a:p>
-            <a:pPr lvl="0" marL="457200" indent="-228600">
-              <a:buFont typeface="Calibri"/>
-              <a:spcAft>
-                <a:spcPts val="1000"/>
-              </a:spcAft>
-              <a:buSzPct val="100000"/>
-              <a:buChar char="•"/>
-              <a:lnSpc>
-                <a:spcPts val="2200"/>
-              </a:lnSpc>
-            </a:pPr>
-            <a:r>
-              <a:rPr sz="2000" b="0">
-                <a:solidFill>
-                  <a:srgbClr val="333333"/>
-                </a:solidFill>
-                <a:latin typeface="Calibri"/>
-              </a:rPr>
-              <a:t>In the implement track, open this module’s examples and the course `common/` solvers</a:t>
-            </a:r>
-          </a:p>
-          <a:p>
-            <a:pPr lvl="0" marL="457200" indent="-228600">
-              <a:buFont typeface="Calibri"/>
-              <a:spcAft>
-                <a:spcPts val="1000"/>
-              </a:spcAft>
-              <a:buSzPct val="100000"/>
-              <a:buChar char="•"/>
-              <a:lnSpc>
-                <a:spcPts val="2200"/>
-              </a:lnSpc>
-            </a:pPr>
-            <a:r>
-              <a:rPr sz="2000" b="0">
-                <a:solidFill>
-                  <a:srgbClr val="333333"/>
-                </a:solidFill>
-                <a:latin typeface="Calibri"/>
-              </a:rPr>
-              <a:t>Parse the tiny graph, run the algorithm with a deterministic seed</a:t>
-            </a:r>
-          </a:p>
-          <a:p>
-            <a:pPr lvl="0" marL="457200" indent="-228600">
-              <a:buFont typeface="Calibri"/>
-              <a:spcAft>
-                <a:spcPts val="1000"/>
-              </a:spcAft>
-              <a:buSzPct val="100000"/>
-              <a:buChar char="•"/>
-              <a:lnSpc>
-                <a:spcPts val="2200"/>
-              </a:lnSpc>
-            </a:pPr>
-            <a:r>
-              <a:rPr sz="2000" b="0">
-                <a:solidFill>
-                  <a:srgbClr val="333333"/>
-                </a:solidFill>
-                <a:latin typeface="Calibri"/>
-              </a:rPr>
-              <a:t>Match the browser goldens before you claim the checklist</a:t>
-            </a:r>
-          </a:p>
-        </p:txBody>
-      </p:sp>
-      <p:sp>
-        <p:nvSpPr>
-          <p:cNvPr id="4" name="TextBox 3"/>
           <p:cNvSpPr txBox="1"/>
           <p:nvPr/>
         </p:nvSpPr>
